--- a/jnu-academic-ppt/themes/jnu-red/stencil.pptx
+++ b/jnu-academic-ppt/themes/jnu-red/stencil.pptx
@@ -3039,7 +3039,7 @@
 </p:sldMaster>
 </file>
 
-<file path=ppt/slides/slide6.xml><?xml version="1.0" encoding="utf-8"?>
+<file path=ppt/slides/slide1.xml><?xml version="1.0" encoding="utf-8"?>
 <p:sld xmlns:a="http://schemas.openxmlformats.org/drawingml/2006/main" xmlns:p="http://schemas.openxmlformats.org/presentationml/2006/main" xmlns:r="http://schemas.openxmlformats.org/officeDocument/2006/relationships">
   <p:cSld>
     <p:bg>
@@ -3778,615 +3778,6 @@
       </p:sp>
       <p:sp>
         <p:nvSpPr>
-          <p:cNvPr id="18" name="shell_AutoShape 18"/>
-          <p:cNvSpPr/>
-          <p:nvPr/>
-        </p:nvSpPr>
-        <p:spPr>
-          <a:xfrm>
-            <a:off x="2832737" y="4073234"/>
-            <a:ext cx="169294" cy="0"/>
-          </a:xfrm>
-          <a:prstGeom prst="line">
-            <a:avLst/>
-          </a:prstGeom>
-          <a:ln w="9525" cap="rnd">
-            <a:solidFill>
-              <a:srgbClr val="C91313"/>
-            </a:solidFill>
-            <a:prstDash val="solid"/>
-            <a:headEnd type="none" w="sm" len="sm"/>
-            <a:tailEnd type="none" w="sm" len="sm"/>
-          </a:ln>
-        </p:spPr>
-      </p:sp>
-      <p:sp>
-        <p:nvSpPr>
-          <p:cNvPr id="19" name="shell_AutoShape 19"/>
-          <p:cNvSpPr/>
-          <p:nvPr/>
-        </p:nvSpPr>
-        <p:spPr>
-          <a:xfrm flipV="1">
-            <a:off x="2838031" y="4067940"/>
-            <a:ext cx="0" cy="307738"/>
-          </a:xfrm>
-          <a:prstGeom prst="line">
-            <a:avLst/>
-          </a:prstGeom>
-          <a:ln w="9525" cap="rnd">
-            <a:solidFill>
-              <a:srgbClr val="C91313"/>
-            </a:solidFill>
-            <a:prstDash val="solid"/>
-            <a:headEnd type="none" w="sm" len="sm"/>
-            <a:tailEnd type="none" w="sm" len="sm"/>
-          </a:ln>
-        </p:spPr>
-      </p:sp>
-      <p:sp>
-        <p:nvSpPr>
-          <p:cNvPr id="20" name="shell_AutoShape 20"/>
-          <p:cNvSpPr/>
-          <p:nvPr/>
-        </p:nvSpPr>
-        <p:spPr>
-          <a:xfrm flipH="1">
-            <a:off x="8647708" y="4678122"/>
-            <a:ext cx="169294" cy="0"/>
-          </a:xfrm>
-          <a:prstGeom prst="line">
-            <a:avLst/>
-          </a:prstGeom>
-          <a:ln w="9525" cap="rnd">
-            <a:solidFill>
-              <a:srgbClr val="C91313"/>
-            </a:solidFill>
-            <a:prstDash val="solid"/>
-            <a:headEnd type="none" w="sm" len="sm"/>
-            <a:tailEnd type="none" w="sm" len="sm"/>
-          </a:ln>
-        </p:spPr>
-      </p:sp>
-      <p:sp>
-        <p:nvSpPr>
-          <p:cNvPr id="21" name="shell_AutoShape 21"/>
-          <p:cNvSpPr/>
-          <p:nvPr/>
-        </p:nvSpPr>
-        <p:spPr>
-          <a:xfrm>
-            <a:off x="8811709" y="4375678"/>
-            <a:ext cx="0" cy="307738"/>
-          </a:xfrm>
-          <a:prstGeom prst="line">
-            <a:avLst/>
-          </a:prstGeom>
-          <a:ln w="9525" cap="rnd">
-            <a:solidFill>
-              <a:srgbClr val="C91313"/>
-            </a:solidFill>
-            <a:prstDash val="solid"/>
-            <a:headEnd type="none" w="sm" len="sm"/>
-            <a:tailEnd type="none" w="sm" len="sm"/>
-          </a:ln>
-        </p:spPr>
-      </p:sp>
-      <p:grpSp>
-        <p:nvGrpSpPr>
-          <p:cNvPr id="22" name="shell_Group 22"/>
-          <p:cNvGrpSpPr/>
-          <p:nvPr/>
-        </p:nvGrpSpPr>
-        <p:grpSpPr>
-          <a:xfrm>
-            <a:off x="7019226" y="6726301"/>
-            <a:ext cx="3962977" cy="639314"/>
-            <a:chOff x="0" y="0"/>
-            <a:chExt cx="1043747" cy="168379"/>
-          </a:xfrm>
-        </p:grpSpPr>
-        <p:sp>
-          <p:nvSpPr>
-            <p:cNvPr id="23" name="shell_Freeform 23"/>
-            <p:cNvSpPr/>
-            <p:nvPr/>
-          </p:nvSpPr>
-          <p:spPr>
-            <a:xfrm>
-              <a:off x="0" y="0"/>
-              <a:ext cx="1043747" cy="168379"/>
-            </a:xfrm>
-            <a:custGeom>
-              <a:avLst/>
-              <a:gdLst/>
-              <a:ahLst/>
-              <a:cxnLst/>
-              <a:rect l="l" t="t" r="r" b="b"/>
-              <a:pathLst>
-                <a:path w="1043747" h="168379">
-                  <a:moveTo>
-                    <a:pt x="84189" y="0"/>
-                  </a:moveTo>
-                  <a:lnTo>
-                    <a:pt x="959558" y="0"/>
-                  </a:lnTo>
-                  <a:cubicBezTo>
-                    <a:pt x="1006054" y="0"/>
-                    <a:pt x="1043747" y="37693"/>
-                    <a:pt x="1043747" y="84189"/>
-                  </a:cubicBezTo>
-                  <a:lnTo>
-                    <a:pt x="1043747" y="84189"/>
-                  </a:lnTo>
-                  <a:cubicBezTo>
-                    <a:pt x="1043747" y="106518"/>
-                    <a:pt x="1034877" y="127932"/>
-                    <a:pt x="1019088" y="143720"/>
-                  </a:cubicBezTo>
-                  <a:cubicBezTo>
-                    <a:pt x="1003300" y="159509"/>
-                    <a:pt x="981886" y="168379"/>
-                    <a:pt x="959558" y="168379"/>
-                  </a:cubicBezTo>
-                  <a:lnTo>
-                    <a:pt x="84189" y="168379"/>
-                  </a:lnTo>
-                  <a:cubicBezTo>
-                    <a:pt x="61861" y="168379"/>
-                    <a:pt x="40447" y="159509"/>
-                    <a:pt x="24659" y="143720"/>
-                  </a:cubicBezTo>
-                  <a:cubicBezTo>
-                    <a:pt x="8870" y="127932"/>
-                    <a:pt x="0" y="106518"/>
-                    <a:pt x="0" y="84189"/>
-                  </a:cubicBezTo>
-                  <a:lnTo>
-                    <a:pt x="0" y="84189"/>
-                  </a:lnTo>
-                  <a:cubicBezTo>
-                    <a:pt x="0" y="61861"/>
-                    <a:pt x="8870" y="40447"/>
-                    <a:pt x="24659" y="24659"/>
-                  </a:cubicBezTo>
-                  <a:cubicBezTo>
-                    <a:pt x="40447" y="8870"/>
-                    <a:pt x="61861" y="0"/>
-                    <a:pt x="84189" y="0"/>
-                  </a:cubicBezTo>
-                  <a:close/>
-                </a:path>
-              </a:pathLst>
-            </a:custGeom>
-            <a:gradFill rotWithShape="1">
-              <a:gsLst>
-                <a:gs pos="0">
-                  <a:srgbClr val="DA3D28">
-                    <a:alpha val="100000"/>
-                  </a:srgbClr>
-                </a:gs>
-                <a:gs pos="100000">
-                  <a:srgbClr val="980000">
-                    <a:alpha val="100000"/>
-                  </a:srgbClr>
-                </a:gs>
-              </a:gsLst>
-              <a:lin ang="2700000"/>
-            </a:gradFill>
-          </p:spPr>
-        </p:sp>
-        <p:sp>
-          <p:nvSpPr>
-            <p:cNvPr id="24" name="shell_TextBox 24"/>
-            <p:cNvSpPr txBox="1"/>
-            <p:nvPr/>
-          </p:nvSpPr>
-          <p:spPr>
-            <a:xfrm>
-              <a:off x="0" y="-38100"/>
-              <a:ext cx="1043747" cy="206479"/>
-            </a:xfrm>
-            <a:prstGeom prst="rect">
-              <a:avLst/>
-            </a:prstGeom>
-          </p:spPr>
-          <p:txBody>
-            <a:bodyPr lIns="50800" tIns="50800" rIns="50800" bIns="50800" rtlCol="0" anchor="ctr"/>
-            <a:lstStyle/>
-            <a:p>
-              <a:pPr algn="ctr">
-                <a:lnSpc>
-                  <a:spcPts val="2659"/>
-                </a:lnSpc>
-              </a:pPr>
-              <a:endParaRPr/>
-            </a:p>
-          </p:txBody>
-        </p:sp>
-      </p:grpSp>
-      <p:grpSp>
-        <p:nvGrpSpPr>
-          <p:cNvPr id="25" name="shell_Group 25"/>
-          <p:cNvGrpSpPr/>
-          <p:nvPr/>
-        </p:nvGrpSpPr>
-        <p:grpSpPr>
-          <a:xfrm>
-            <a:off x="7272739" y="6991155"/>
-            <a:ext cx="109605" cy="109605"/>
-            <a:chOff x="0" y="0"/>
-            <a:chExt cx="812800" cy="812800"/>
-          </a:xfrm>
-        </p:grpSpPr>
-        <p:sp>
-          <p:nvSpPr>
-            <p:cNvPr id="26" name="shell_Freeform 26"/>
-            <p:cNvSpPr/>
-            <p:nvPr/>
-          </p:nvSpPr>
-          <p:spPr>
-            <a:xfrm>
-              <a:off x="0" y="0"/>
-              <a:ext cx="812800" cy="812800"/>
-            </a:xfrm>
-            <a:custGeom>
-              <a:avLst/>
-              <a:gdLst/>
-              <a:ahLst/>
-              <a:cxnLst/>
-              <a:rect l="l" t="t" r="r" b="b"/>
-              <a:pathLst>
-                <a:path w="812800" h="812800">
-                  <a:moveTo>
-                    <a:pt x="406400" y="0"/>
-                  </a:moveTo>
-                  <a:cubicBezTo>
-                    <a:pt x="181951" y="0"/>
-                    <a:pt x="0" y="181951"/>
-                    <a:pt x="0" y="406400"/>
-                  </a:cubicBezTo>
-                  <a:cubicBezTo>
-                    <a:pt x="0" y="630849"/>
-                    <a:pt x="181951" y="812800"/>
-                    <a:pt x="406400" y="812800"/>
-                  </a:cubicBezTo>
-                  <a:cubicBezTo>
-                    <a:pt x="630849" y="812800"/>
-                    <a:pt x="812800" y="630849"/>
-                    <a:pt x="812800" y="406400"/>
-                  </a:cubicBezTo>
-                  <a:cubicBezTo>
-                    <a:pt x="812800" y="181951"/>
-                    <a:pt x="630849" y="0"/>
-                    <a:pt x="406400" y="0"/>
-                  </a:cubicBezTo>
-                  <a:close/>
-                </a:path>
-              </a:pathLst>
-            </a:custGeom>
-            <a:solidFill>
-              <a:srgbClr val="FDBE90"/>
-            </a:solidFill>
-          </p:spPr>
-        </p:sp>
-        <p:sp>
-          <p:nvSpPr>
-            <p:cNvPr id="27" name="shell_TextBox 27"/>
-            <p:cNvSpPr txBox="1"/>
-            <p:nvPr/>
-          </p:nvSpPr>
-          <p:spPr>
-            <a:xfrm>
-              <a:off x="76200" y="38100"/>
-              <a:ext cx="660400" cy="698500"/>
-            </a:xfrm>
-            <a:prstGeom prst="rect">
-              <a:avLst/>
-            </a:prstGeom>
-          </p:spPr>
-          <p:txBody>
-            <a:bodyPr lIns="50800" tIns="50800" rIns="50800" bIns="50800" rtlCol="0" anchor="ctr"/>
-            <a:lstStyle/>
-            <a:p>
-              <a:pPr algn="ctr">
-                <a:lnSpc>
-                  <a:spcPts val="2659"/>
-                </a:lnSpc>
-              </a:pPr>
-              <a:endParaRPr/>
-            </a:p>
-          </p:txBody>
-        </p:sp>
-      </p:grpSp>
-      <p:grpSp>
-        <p:nvGrpSpPr>
-          <p:cNvPr id="28" name="shell_Group 28"/>
-          <p:cNvGrpSpPr/>
-          <p:nvPr/>
-        </p:nvGrpSpPr>
-        <p:grpSpPr>
-          <a:xfrm>
-            <a:off x="7175655" y="7019389"/>
-            <a:ext cx="53138" cy="53138"/>
-            <a:chOff x="0" y="0"/>
-            <a:chExt cx="812800" cy="812800"/>
-          </a:xfrm>
-        </p:grpSpPr>
-        <p:sp>
-          <p:nvSpPr>
-            <p:cNvPr id="29" name="shell_Freeform 29"/>
-            <p:cNvSpPr/>
-            <p:nvPr/>
-          </p:nvSpPr>
-          <p:spPr>
-            <a:xfrm>
-              <a:off x="0" y="0"/>
-              <a:ext cx="812800" cy="812800"/>
-            </a:xfrm>
-            <a:custGeom>
-              <a:avLst/>
-              <a:gdLst/>
-              <a:ahLst/>
-              <a:cxnLst/>
-              <a:rect l="l" t="t" r="r" b="b"/>
-              <a:pathLst>
-                <a:path w="812800" h="812800">
-                  <a:moveTo>
-                    <a:pt x="406400" y="0"/>
-                  </a:moveTo>
-                  <a:cubicBezTo>
-                    <a:pt x="181951" y="0"/>
-                    <a:pt x="0" y="181951"/>
-                    <a:pt x="0" y="406400"/>
-                  </a:cubicBezTo>
-                  <a:cubicBezTo>
-                    <a:pt x="0" y="630849"/>
-                    <a:pt x="181951" y="812800"/>
-                    <a:pt x="406400" y="812800"/>
-                  </a:cubicBezTo>
-                  <a:cubicBezTo>
-                    <a:pt x="630849" y="812800"/>
-                    <a:pt x="812800" y="630849"/>
-                    <a:pt x="812800" y="406400"/>
-                  </a:cubicBezTo>
-                  <a:cubicBezTo>
-                    <a:pt x="812800" y="181951"/>
-                    <a:pt x="630849" y="0"/>
-                    <a:pt x="406400" y="0"/>
-                  </a:cubicBezTo>
-                  <a:close/>
-                </a:path>
-              </a:pathLst>
-            </a:custGeom>
-            <a:solidFill>
-              <a:srgbClr val="FDBE90">
-                <a:alpha val="45882"/>
-              </a:srgbClr>
-            </a:solidFill>
-          </p:spPr>
-        </p:sp>
-        <p:sp>
-          <p:nvSpPr>
-            <p:cNvPr id="30" name="shell_TextBox 30"/>
-            <p:cNvSpPr txBox="1"/>
-            <p:nvPr/>
-          </p:nvSpPr>
-          <p:spPr>
-            <a:xfrm>
-              <a:off x="76200" y="38100"/>
-              <a:ext cx="660400" cy="698500"/>
-            </a:xfrm>
-            <a:prstGeom prst="rect">
-              <a:avLst/>
-            </a:prstGeom>
-          </p:spPr>
-          <p:txBody>
-            <a:bodyPr lIns="50800" tIns="50800" rIns="50800" bIns="50800" rtlCol="0" anchor="ctr"/>
-            <a:lstStyle/>
-            <a:p>
-              <a:pPr algn="ctr">
-                <a:lnSpc>
-                  <a:spcPts val="2659"/>
-                </a:lnSpc>
-              </a:pPr>
-              <a:endParaRPr/>
-            </a:p>
-          </p:txBody>
-        </p:sp>
-      </p:grpSp>
-      <p:grpSp>
-        <p:nvGrpSpPr>
-          <p:cNvPr id="31" name="shell_Group 31"/>
-          <p:cNvGrpSpPr/>
-          <p:nvPr/>
-        </p:nvGrpSpPr>
-        <p:grpSpPr>
-          <a:xfrm rot="-10800000">
-            <a:off x="10619085" y="6991155"/>
-            <a:ext cx="109605" cy="109605"/>
-            <a:chOff x="0" y="0"/>
-            <a:chExt cx="812800" cy="812800"/>
-          </a:xfrm>
-        </p:grpSpPr>
-        <p:sp>
-          <p:nvSpPr>
-            <p:cNvPr id="32" name="shell_Freeform 32"/>
-            <p:cNvSpPr/>
-            <p:nvPr/>
-          </p:nvSpPr>
-          <p:spPr>
-            <a:xfrm>
-              <a:off x="0" y="0"/>
-              <a:ext cx="812800" cy="812800"/>
-            </a:xfrm>
-            <a:custGeom>
-              <a:avLst/>
-              <a:gdLst/>
-              <a:ahLst/>
-              <a:cxnLst/>
-              <a:rect l="l" t="t" r="r" b="b"/>
-              <a:pathLst>
-                <a:path w="812800" h="812800">
-                  <a:moveTo>
-                    <a:pt x="406400" y="0"/>
-                  </a:moveTo>
-                  <a:cubicBezTo>
-                    <a:pt x="181951" y="0"/>
-                    <a:pt x="0" y="181951"/>
-                    <a:pt x="0" y="406400"/>
-                  </a:cubicBezTo>
-                  <a:cubicBezTo>
-                    <a:pt x="0" y="630849"/>
-                    <a:pt x="181951" y="812800"/>
-                    <a:pt x="406400" y="812800"/>
-                  </a:cubicBezTo>
-                  <a:cubicBezTo>
-                    <a:pt x="630849" y="812800"/>
-                    <a:pt x="812800" y="630849"/>
-                    <a:pt x="812800" y="406400"/>
-                  </a:cubicBezTo>
-                  <a:cubicBezTo>
-                    <a:pt x="812800" y="181951"/>
-                    <a:pt x="630849" y="0"/>
-                    <a:pt x="406400" y="0"/>
-                  </a:cubicBezTo>
-                  <a:close/>
-                </a:path>
-              </a:pathLst>
-            </a:custGeom>
-            <a:solidFill>
-              <a:srgbClr val="FDBE90"/>
-            </a:solidFill>
-          </p:spPr>
-        </p:sp>
-        <p:sp>
-          <p:nvSpPr>
-            <p:cNvPr id="33" name="shell_TextBox 33"/>
-            <p:cNvSpPr txBox="1"/>
-            <p:nvPr/>
-          </p:nvSpPr>
-          <p:spPr>
-            <a:xfrm>
-              <a:off x="76200" y="38100"/>
-              <a:ext cx="660400" cy="698500"/>
-            </a:xfrm>
-            <a:prstGeom prst="rect">
-              <a:avLst/>
-            </a:prstGeom>
-          </p:spPr>
-          <p:txBody>
-            <a:bodyPr lIns="50800" tIns="50800" rIns="50800" bIns="50800" rtlCol="0" anchor="ctr"/>
-            <a:lstStyle/>
-            <a:p>
-              <a:pPr algn="ctr">
-                <a:lnSpc>
-                  <a:spcPts val="2659"/>
-                </a:lnSpc>
-              </a:pPr>
-              <a:endParaRPr/>
-            </a:p>
-          </p:txBody>
-        </p:sp>
-      </p:grpSp>
-      <p:grpSp>
-        <p:nvGrpSpPr>
-          <p:cNvPr id="34" name="shell_Group 34"/>
-          <p:cNvGrpSpPr/>
-          <p:nvPr/>
-        </p:nvGrpSpPr>
-        <p:grpSpPr>
-          <a:xfrm rot="-10800000">
-            <a:off x="10772637" y="7019389"/>
-            <a:ext cx="53138" cy="53138"/>
-            <a:chOff x="0" y="0"/>
-            <a:chExt cx="812800" cy="812800"/>
-          </a:xfrm>
-        </p:grpSpPr>
-        <p:sp>
-          <p:nvSpPr>
-            <p:cNvPr id="35" name="shell_Freeform 35"/>
-            <p:cNvSpPr/>
-            <p:nvPr/>
-          </p:nvSpPr>
-          <p:spPr>
-            <a:xfrm>
-              <a:off x="0" y="0"/>
-              <a:ext cx="812800" cy="812800"/>
-            </a:xfrm>
-            <a:custGeom>
-              <a:avLst/>
-              <a:gdLst/>
-              <a:ahLst/>
-              <a:cxnLst/>
-              <a:rect l="l" t="t" r="r" b="b"/>
-              <a:pathLst>
-                <a:path w="812800" h="812800">
-                  <a:moveTo>
-                    <a:pt x="406400" y="0"/>
-                  </a:moveTo>
-                  <a:cubicBezTo>
-                    <a:pt x="181951" y="0"/>
-                    <a:pt x="0" y="181951"/>
-                    <a:pt x="0" y="406400"/>
-                  </a:cubicBezTo>
-                  <a:cubicBezTo>
-                    <a:pt x="0" y="630849"/>
-                    <a:pt x="181951" y="812800"/>
-                    <a:pt x="406400" y="812800"/>
-                  </a:cubicBezTo>
-                  <a:cubicBezTo>
-                    <a:pt x="630849" y="812800"/>
-                    <a:pt x="812800" y="630849"/>
-                    <a:pt x="812800" y="406400"/>
-                  </a:cubicBezTo>
-                  <a:cubicBezTo>
-                    <a:pt x="812800" y="181951"/>
-                    <a:pt x="630849" y="0"/>
-                    <a:pt x="406400" y="0"/>
-                  </a:cubicBezTo>
-                  <a:close/>
-                </a:path>
-              </a:pathLst>
-            </a:custGeom>
-            <a:solidFill>
-              <a:srgbClr val="FDBE90">
-                <a:alpha val="45882"/>
-              </a:srgbClr>
-            </a:solidFill>
-          </p:spPr>
-        </p:sp>
-        <p:sp>
-          <p:nvSpPr>
-            <p:cNvPr id="36" name="shell_TextBox 36"/>
-            <p:cNvSpPr txBox="1"/>
-            <p:nvPr/>
-          </p:nvSpPr>
-          <p:spPr>
-            <a:xfrm>
-              <a:off x="76200" y="38100"/>
-              <a:ext cx="660400" cy="698500"/>
-            </a:xfrm>
-            <a:prstGeom prst="rect">
-              <a:avLst/>
-            </a:prstGeom>
-          </p:spPr>
-          <p:txBody>
-            <a:bodyPr lIns="50800" tIns="50800" rIns="50800" bIns="50800" rtlCol="0" anchor="ctr"/>
-            <a:lstStyle/>
-            <a:p>
-              <a:pPr algn="ctr">
-                <a:lnSpc>
-                  <a:spcPts val="2659"/>
-                </a:lnSpc>
-              </a:pPr>
-              <a:endParaRPr/>
-            </a:p>
-          </p:txBody>
-        </p:sp>
-      </p:grpSp>
-      <p:sp>
-        <p:nvSpPr>
           <p:cNvPr id="37" name="shell_Freeform 37"/>
           <p:cNvSpPr/>
           <p:nvPr/>
@@ -4864,7 +4255,7 @@
 </p:sld>
 </file>
 
-<file path=ppt/slides/slide7.xml><?xml version="1.0" encoding="utf-8"?>
+<file path=ppt/slides/slide2.xml><?xml version="1.0" encoding="utf-8"?>
 <p:sld xmlns:a="http://schemas.openxmlformats.org/drawingml/2006/main" xmlns:p="http://schemas.openxmlformats.org/presentationml/2006/main" xmlns:r="http://schemas.openxmlformats.org/officeDocument/2006/relationships">
   <p:cSld>
     <p:bg>
@@ -5434,7 +4825,7 @@
 </p:sld>
 </file>
 
-<file path=ppt/slides/slide8.xml><?xml version="1.0" encoding="utf-8"?>
+<file path=ppt/slides/slide3.xml><?xml version="1.0" encoding="utf-8"?>
 <p:sld xmlns:a="http://schemas.openxmlformats.org/drawingml/2006/main" xmlns:p="http://schemas.openxmlformats.org/presentationml/2006/main" xmlns:r="http://schemas.openxmlformats.org/officeDocument/2006/relationships">
   <p:cSld>
     <p:bg>
